--- a/catalog/samples/issue_cause_solution.pptx
+++ b/catalog/samples/issue_cause_solution.pptx
@@ -1122,7 +1122,7 @@
           </a:p>
           <a:p>
             <a:r>
-              <a:t>  "template_sha256": "457941da29456d7d22d0b13e26d37355c054f4a3388934b4758b87dc696a5bf5"</a:t>
+              <a:t>  "template_sha256": "ab03d673c0e8cae23e0537f77f11b8f4dc69540b40e3435c213fbd4071340b1d"</a:t>
             </a:r>
           </a:p>
           <a:p>
